--- a/assets/powerpoints/module-n2-autobus/C1-a-l-arret-d-autobus.pptx
+++ b/assets/powerpoints/module-n2-autobus/C1-a-l-arret-d-autobus.pptx
@@ -11116,7 +11116,25 @@
                 </a:solidFill>
                 <a:latin typeface="Verdana"/>
               </a:rPr>
-              <a:t>« Il passe &lt;b&gt;aux quinze minutes&lt;/b&gt; » veut dire : toutes les quinze minutes — 8 h, 8 h 15, 8 h 30, 8 h 45…</a:t>
+              <a:t>« Il passe </a:t>
+            </a:r>
+            <a:r>
+              <a:rPr sz="2000" b="1" i="0">
+                <a:solidFill>
+                  <a:srgbClr val="4B4F52"/>
+                </a:solidFill>
+                <a:latin typeface="Verdana"/>
+              </a:rPr>
+              <a:t>aux quinze minutes</a:t>
+            </a:r>
+            <a:r>
+              <a:rPr sz="2000" b="0" i="0">
+                <a:solidFill>
+                  <a:srgbClr val="4B4F52"/>
+                </a:solidFill>
+                <a:latin typeface="Verdana"/>
+              </a:rPr>
+              <a:t> » veut dire : toutes les quinze minutes — 8 h, 8 h 15, 8 h 30, 8 h 45…</a:t>
             </a:r>
           </a:p>
         </p:txBody>
@@ -11659,13 +11677,40 @@
               </a:lnSpc>
             </a:pPr>
             <a:r>
-              <a:rPr sz="2000" b="0" i="0">
+              <a:rPr sz="2000" b="1" i="0">
                 <a:solidFill>
                   <a:srgbClr val="4B4F52"/>
                 </a:solidFill>
                 <a:latin typeface="Verdana"/>
               </a:rPr>
-              <a:t>&lt;b&gt;Dans&lt;/b&gt; cinq minutes : à partir du moment où on parle. &lt;b&gt;À&lt;/b&gt; cinq heures : une heure fixe sur l'horloge. Les deux ne se confondent jamais.</a:t>
+              <a:t>Dans</a:t>
+            </a:r>
+            <a:r>
+              <a:rPr sz="2000" b="0" i="0">
+                <a:solidFill>
+                  <a:srgbClr val="4B4F52"/>
+                </a:solidFill>
+                <a:latin typeface="Verdana"/>
+              </a:rPr>
+              <a:t> cinq minutes : à partir du moment où on parle. </a:t>
+            </a:r>
+            <a:r>
+              <a:rPr sz="2000" b="1" i="0">
+                <a:solidFill>
+                  <a:srgbClr val="4B4F52"/>
+                </a:solidFill>
+                <a:latin typeface="Verdana"/>
+              </a:rPr>
+              <a:t>À</a:t>
+            </a:r>
+            <a:r>
+              <a:rPr sz="2000" b="0" i="0">
+                <a:solidFill>
+                  <a:srgbClr val="4B4F52"/>
+                </a:solidFill>
+                <a:latin typeface="Verdana"/>
+              </a:rPr>
+              <a:t> cinq heures : une heure fixe sur l'horloge. Les deux ne se confondent jamais.</a:t>
             </a:r>
           </a:p>
         </p:txBody>
